--- a/example/workbuddy_Kimi-K3_个人信息介绍.pptx
+++ b/example/workbuddy_Kimi-K3_个人信息介绍.pptx
@@ -1291,7 +1291,7 @@
           <a:lstStyle/>
           <a:p>
             <a:r>
-              <a:t>最后讲沉淀。把 GSAP 动效方法和 PPT 生成方法分别蒸馏成两个开源技能，前者四路分发、协议合规，后者建成场景路由、风格库与渲染路径体系。做系统和做方法资产，在我这里是同一种工程能力的两种表达。</a:t>
+              <a:t>最后讲沉淀。把 GSAP 动效方法和 PPT 生成方法分别提炼成两个开源技能，前者四路分发、协议合规，后者建成场景路由、风格库与渲染路径体系。做系统和做方法资产，在我这里是同一种工程能力的两种表达。</a:t>
             </a:r>
           </a:p>
         </p:txBody>
@@ -7399,7 +7399,7 @@
                 <a:latin typeface="Microsoft YaHei"/>
                 <a:ea typeface="Microsoft YaHei"/>
               </a:rPr>
-              <a:t>·  Universal PPT：蒸馏 17 个开源 skill 的全场景演示技能</a:t>
+              <a:t>·  Universal PPT：提炼 17 个开源 skill 的全场景演示技能</a:t>
             </a:r>
           </a:p>
           <a:p>
